--- a/bemutató.pptx
+++ b/bemutató.pptx
@@ -4,6 +4,9 @@
   <p:sldMasterIdLst>
     <p:sldMasterId id="2147483648" r:id="rId1"/>
   </p:sldMasterIdLst>
+  <p:notesMasterIdLst>
+    <p:notesMasterId r:id="rId11"/>
+  </p:notesMasterIdLst>
   <p:sldIdLst>
     <p:sldId id="256" r:id="rId2"/>
     <p:sldId id="257" r:id="rId3"/>
@@ -15,10 +18,7 @@
     <p:sldId id="263" r:id="rId9"/>
     <p:sldId id="264" r:id="rId10"/>
   </p:sldIdLst>
-  <p:notesMasterIdLst>
-    <p:notesMasterId r:id="rId11"/>
-  </p:notesMasterIdLst>
-  <p:sldSz cx="9144000" cy="5143500"/>
+  <p:sldSz cx="9144000" cy="5143500" type="screen16x9"/>
   <p:notesSz cx="5143500" cy="9144000"/>
   <p:defaultTextStyle>
     <a:lvl1pPr marL="0" algn="l" defTabSz="914400" rtl="0" eaLnBrk="1" latinLnBrk="0" hangingPunct="1">
@@ -112,7 +112,20 @@
       </a:defRPr>
     </a:lvl9pPr>
   </p:defaultTextStyle>
+  <p:extLst>
+    <p:ext uri="{EFAFB233-063F-42B5-8137-9DF3F51BA10A}">
+      <p15:sldGuideLst xmlns:p15="http://schemas.microsoft.com/office/powerpoint/2012/main"/>
+    </p:ext>
+  </p:extLst>
 </p:presentation>
+</file>
+
+<file path=ppt/revisionInfo.xml><?xml version="1.0" encoding="utf-8"?>
+<p1510:revInfo xmlns:a="http://schemas.openxmlformats.org/drawingml/2006/main" xmlns:r="http://schemas.openxmlformats.org/officeDocument/2006/relationships" xmlns:p1510="http://schemas.microsoft.com/office/powerpoint/2015/10/main">
+  <p1510:revLst>
+    <p1510:client id="{6070A5F4-79F8-45B9-8035-60EECA0AA319}" v="8" dt="2026-05-21T19:59:21.408"/>
+  </p1510:revLst>
+</p1510:revInfo>
 </file>
 
 <file path=ppt/notesMasters/notesMaster1.xml><?xml version="1.0" encoding="utf-8"?>
@@ -139,7 +152,7 @@
       </p:grpSpPr>
       <p:sp>
         <p:nvSpPr>
-          <p:cNvPr id="2" name="Header Placeholder 1"/>
+          <p:cNvPr id="2" name="Élőfej helye 1"/>
           <p:cNvSpPr>
             <a:spLocks noGrp="1"/>
           </p:cNvSpPr>
@@ -150,7 +163,7 @@
         <p:spPr>
           <a:xfrm>
             <a:off x="0" y="0"/>
-            <a:ext cx="2971800" cy="458788"/>
+            <a:ext cx="2228850" cy="458788"/>
           </a:xfrm>
           <a:prstGeom prst="rect">
             <a:avLst/>
@@ -164,13 +177,13 @@
             </a:lvl1pPr>
           </a:lstStyle>
           <a:p>
-            <a:endParaRPr lang="en-US"/>
-          </a:p>
-        </p:txBody>
-      </p:sp>
-      <p:sp>
-        <p:nvSpPr>
-          <p:cNvPr id="3" name="Date Placeholder 2"/>
+            <a:endParaRPr lang="hu-HU"/>
+          </a:p>
+        </p:txBody>
+      </p:sp>
+      <p:sp>
+        <p:nvSpPr>
+          <p:cNvPr id="3" name="Dátum helye 2"/>
           <p:cNvSpPr>
             <a:spLocks noGrp="1"/>
           </p:cNvSpPr>
@@ -180,8 +193,8 @@
         </p:nvSpPr>
         <p:spPr>
           <a:xfrm>
-            <a:off x="3884613" y="0"/>
-            <a:ext cx="2971800" cy="458788"/>
+            <a:off x="2913063" y="0"/>
+            <a:ext cx="2228850" cy="458788"/>
           </a:xfrm>
           <a:prstGeom prst="rect">
             <a:avLst/>
@@ -195,17 +208,16 @@
             </a:lvl1pPr>
           </a:lstStyle>
           <a:p>
-            <a:fld id="{5282F153-3F37-0F45-9E97-73ACFA13230C}" type="datetimeFigureOut">
-              <a:rPr lang="en-US"/>
-              <a:t>7/23/19</a:t>
+            <a:fld id="{E6E69476-3080-405B-9EA5-CF777BBD82C5}" type="datetimeFigureOut">
+              <a:t>2026. 05. 21.</a:t>
             </a:fld>
-            <a:endParaRPr lang="en-US"/>
-          </a:p>
-        </p:txBody>
-      </p:sp>
-      <p:sp>
-        <p:nvSpPr>
-          <p:cNvPr id="4" name="Slide Image Placeholder 3"/>
+            <a:endParaRPr lang="hu-HU"/>
+          </a:p>
+        </p:txBody>
+      </p:sp>
+      <p:sp>
+        <p:nvSpPr>
+          <p:cNvPr id="4" name="Diakép helye 3"/>
           <p:cNvSpPr>
             <a:spLocks noGrp="1" noRot="1" noChangeAspect="1"/>
           </p:cNvSpPr>
@@ -215,7 +227,7 @@
         </p:nvSpPr>
         <p:spPr>
           <a:xfrm>
-            <a:off x="685800" y="1143000"/>
+            <a:off x="-171450" y="1143000"/>
             <a:ext cx="5486400" cy="3086100"/>
           </a:xfrm>
           <a:prstGeom prst="rect">
@@ -232,13 +244,13 @@
           <a:bodyPr vert="horz" lIns="91440" tIns="45720" rIns="91440" bIns="45720" rtlCol="0" anchor="ctr"/>
           <a:lstStyle/>
           <a:p>
-            <a:endParaRPr lang="en-US"/>
-          </a:p>
-        </p:txBody>
-      </p:sp>
-      <p:sp>
-        <p:nvSpPr>
-          <p:cNvPr id="5" name="Notes Placeholder 4"/>
+            <a:endParaRPr lang="hu-HU"/>
+          </a:p>
+        </p:txBody>
+      </p:sp>
+      <p:sp>
+        <p:nvSpPr>
+          <p:cNvPr id="5" name="Jegyzetek helye 4"/>
           <p:cNvSpPr>
             <a:spLocks noGrp="1"/>
           </p:cNvSpPr>
@@ -248,8 +260,8 @@
         </p:nvSpPr>
         <p:spPr>
           <a:xfrm>
-            <a:off x="685800" y="4400550"/>
-            <a:ext cx="5486400" cy="3600450"/>
+            <a:off x="514350" y="4400550"/>
+            <a:ext cx="4114800" cy="3600450"/>
           </a:xfrm>
           <a:prstGeom prst="rect">
             <a:avLst/>
@@ -261,43 +273,43 @@
           <a:p>
             <a:pPr lvl="0"/>
             <a:r>
-              <a:rPr lang="en-US"/>
-              <a:t>Click to edit Master text styles</a:t>
+              <a:rPr lang="hu-HU"/>
+              <a:t>Mintaszöveg szerkesztése</a:t>
             </a:r>
           </a:p>
           <a:p>
             <a:pPr lvl="1"/>
             <a:r>
-              <a:rPr lang="en-US"/>
-              <a:t>Second level</a:t>
+              <a:rPr lang="hu-HU"/>
+              <a:t>Második szint</a:t>
             </a:r>
           </a:p>
           <a:p>
             <a:pPr lvl="2"/>
             <a:r>
-              <a:rPr lang="en-US"/>
-              <a:t>Third level</a:t>
+              <a:rPr lang="hu-HU"/>
+              <a:t>Harmadik szint</a:t>
             </a:r>
           </a:p>
           <a:p>
             <a:pPr lvl="3"/>
             <a:r>
-              <a:rPr lang="en-US"/>
-              <a:t>Fourth level</a:t>
+              <a:rPr lang="hu-HU"/>
+              <a:t>Negyedik szint</a:t>
             </a:r>
           </a:p>
           <a:p>
             <a:pPr lvl="4"/>
             <a:r>
-              <a:rPr lang="en-US"/>
-              <a:t>Fifth level</a:t>
-            </a:r>
-          </a:p>
-        </p:txBody>
-      </p:sp>
-      <p:sp>
-        <p:nvSpPr>
-          <p:cNvPr id="6" name="Footer Placeholder 5"/>
+              <a:rPr lang="hu-HU"/>
+              <a:t>Ötödik szint</a:t>
+            </a:r>
+          </a:p>
+        </p:txBody>
+      </p:sp>
+      <p:sp>
+        <p:nvSpPr>
+          <p:cNvPr id="6" name="Élőláb helye 5"/>
           <p:cNvSpPr>
             <a:spLocks noGrp="1"/>
           </p:cNvSpPr>
@@ -308,7 +320,7 @@
         <p:spPr>
           <a:xfrm>
             <a:off x="0" y="8685213"/>
-            <a:ext cx="2971800" cy="458787"/>
+            <a:ext cx="2228850" cy="458787"/>
           </a:xfrm>
           <a:prstGeom prst="rect">
             <a:avLst/>
@@ -322,13 +334,13 @@
             </a:lvl1pPr>
           </a:lstStyle>
           <a:p>
-            <a:endParaRPr lang="en-US"/>
-          </a:p>
-        </p:txBody>
-      </p:sp>
-      <p:sp>
-        <p:nvSpPr>
-          <p:cNvPr id="7" name="Slide Number Placeholder 6"/>
+            <a:endParaRPr lang="hu-HU"/>
+          </a:p>
+        </p:txBody>
+      </p:sp>
+      <p:sp>
+        <p:nvSpPr>
+          <p:cNvPr id="7" name="Dia számának helye 6"/>
           <p:cNvSpPr>
             <a:spLocks noGrp="1"/>
           </p:cNvSpPr>
@@ -338,8 +350,8 @@
         </p:nvSpPr>
         <p:spPr>
           <a:xfrm>
-            <a:off x="3884613" y="8685213"/>
-            <a:ext cx="2971800" cy="458787"/>
+            <a:off x="2913063" y="8685213"/>
+            <a:ext cx="2228850" cy="458787"/>
           </a:xfrm>
           <a:prstGeom prst="rect">
             <a:avLst/>
@@ -353,18 +365,17 @@
             </a:lvl1pPr>
           </a:lstStyle>
           <a:p>
-            <a:fld id="{CE5E9CC1-C706-0F49-92D6-E571CC5EEA8F}" type="slidenum">
-              <a:rPr lang="en-US"/>
+            <a:fld id="{E439E493-2728-4E42-9D87-32CC54806864}" type="slidenum">
               <a:t>‹#›</a:t>
             </a:fld>
-            <a:endParaRPr lang="en-US"/>
+            <a:endParaRPr lang="hu-HU"/>
           </a:p>
         </p:txBody>
       </p:sp>
     </p:spTree>
     <p:extLst>
       <p:ext uri="{BB962C8B-B14F-4D97-AF65-F5344CB8AC3E}">
-        <p14:creationId xmlns:p14="http://schemas.microsoft.com/office/powerpoint/2010/main" val="1024086991"/>
+        <p14:creationId xmlns:p14="http://schemas.microsoft.com/office/powerpoint/2010/main" val="2601137970"/>
       </p:ext>
     </p:extLst>
   </p:cSld>
@@ -508,10 +519,6 @@
           <a:bodyPr/>
           <a:lstStyle/>
           <a:p>
-            <a:r>
-              <a:rPr lang="en-US" dirty="0"/>
-              <a:t/>
-            </a:r>
             <a:endParaRPr lang="en-US" dirty="0"/>
           </a:p>
         </p:txBody>
@@ -596,10 +603,6 @@
           <a:bodyPr/>
           <a:lstStyle/>
           <a:p>
-            <a:r>
-              <a:rPr lang="en-US" dirty="0"/>
-              <a:t/>
-            </a:r>
             <a:endParaRPr lang="en-US" dirty="0"/>
           </a:p>
         </p:txBody>
@@ -684,10 +687,6 @@
           <a:bodyPr/>
           <a:lstStyle/>
           <a:p>
-            <a:r>
-              <a:rPr lang="en-US" dirty="0"/>
-              <a:t/>
-            </a:r>
             <a:endParaRPr lang="en-US" dirty="0"/>
           </a:p>
         </p:txBody>
@@ -772,10 +771,6 @@
           <a:bodyPr/>
           <a:lstStyle/>
           <a:p>
-            <a:r>
-              <a:rPr lang="en-US" dirty="0"/>
-              <a:t/>
-            </a:r>
             <a:endParaRPr lang="en-US" dirty="0"/>
           </a:p>
         </p:txBody>
@@ -860,10 +855,6 @@
           <a:bodyPr/>
           <a:lstStyle/>
           <a:p>
-            <a:r>
-              <a:rPr lang="en-US" dirty="0"/>
-              <a:t/>
-            </a:r>
             <a:endParaRPr lang="en-US" dirty="0"/>
           </a:p>
         </p:txBody>
@@ -948,10 +939,6 @@
           <a:bodyPr/>
           <a:lstStyle/>
           <a:p>
-            <a:r>
-              <a:rPr lang="en-US" dirty="0"/>
-              <a:t/>
-            </a:r>
             <a:endParaRPr lang="en-US" dirty="0"/>
           </a:p>
         </p:txBody>
@@ -1036,10 +1023,6 @@
           <a:bodyPr/>
           <a:lstStyle/>
           <a:p>
-            <a:r>
-              <a:rPr lang="en-US" dirty="0"/>
-              <a:t/>
-            </a:r>
             <a:endParaRPr lang="en-US" dirty="0"/>
           </a:p>
         </p:txBody>
@@ -1124,10 +1107,6 @@
           <a:bodyPr/>
           <a:lstStyle/>
           <a:p>
-            <a:r>
-              <a:rPr lang="en-US" dirty="0"/>
-              <a:t/>
-            </a:r>
             <a:endParaRPr lang="en-US" dirty="0"/>
           </a:p>
         </p:txBody>
@@ -1212,10 +1191,6 @@
           <a:bodyPr/>
           <a:lstStyle/>
           <a:p>
-            <a:r>
-              <a:rPr lang="en-US" dirty="0"/>
-              <a:t/>
-            </a:r>
             <a:endParaRPr lang="en-US" dirty="0"/>
           </a:p>
         </p:txBody>
@@ -1289,6 +1264,11 @@
 <file path=ppt/slideMasters/slideMaster1.xml><?xml version="1.0" encoding="utf-8"?>
 <p:sldMaster xmlns:a="http://schemas.openxmlformats.org/drawingml/2006/main" xmlns:r="http://schemas.openxmlformats.org/officeDocument/2006/relationships" xmlns:p="http://schemas.openxmlformats.org/presentationml/2006/main">
   <p:cSld>
+    <p:bg>
+      <p:bgRef idx="1001">
+        <a:schemeClr val="bg1"/>
+      </p:bgRef>
+    </p:bg>
     <p:spTree>
       <p:nvGrpSpPr>
         <p:cNvPr id="1" name=""/>
@@ -1571,6 +1551,7 @@
         <a:solidFill>
           <a:srgbClr val="FFFFFF"/>
         </a:solidFill>
+        <a:effectLst/>
       </p:bgPr>
     </p:bg>
     <p:spTree>
@@ -1608,7 +1589,7 @@
           <a:bodyPr wrap="square" rtlCol="0" anchor="ctr"/>
           <a:lstStyle/>
           <a:p>
-            <a:pPr algn="ctr" indent="0" marL="0">
+            <a:pPr marL="0" indent="0" algn="ctr">
               <a:buNone/>
             </a:pPr>
             <a:r>
@@ -1644,10 +1625,10 @@
           <a:ln/>
         </p:spPr>
         <p:txBody>
-          <a:bodyPr wrap="square" rtlCol="0" anchor="ctr"/>
-          <a:lstStyle/>
-          <a:p>
-            <a:pPr algn="ctr" indent="0" marL="0">
+          <a:bodyPr wrap="square" lIns="91440" tIns="45720" rIns="91440" bIns="45720" rtlCol="0" anchor="ctr"/>
+          <a:lstStyle/>
+          <a:p>
+            <a:pPr marL="0" indent="0" algn="ctr">
               <a:buNone/>
             </a:pPr>
             <a:r>
@@ -1655,13 +1636,61 @@
                 <a:solidFill>
                   <a:srgbClr val="6B7280"/>
                 </a:solidFill>
-                <a:latin typeface="Calibri" pitchFamily="34" charset="0"/>
-                <a:ea typeface="Calibri" pitchFamily="34" charset="-122"/>
-                <a:cs typeface="Calibri" pitchFamily="34" charset="-120"/>
-              </a:rPr>
-              <a:t>WPF asztali alkalmazás – C# / .NET 10</a:t>
-            </a:r>
-            <a:endParaRPr lang="en-US" sz="2000" dirty="0"/>
+                <a:latin typeface="Calibri"/>
+                <a:ea typeface="Calibri"/>
+                <a:cs typeface="Calibri"/>
+              </a:rPr>
+              <a:t>WPF </a:t>
+            </a:r>
+            <a:r>
+              <a:rPr lang="en-US" sz="2000" dirty="0" err="1">
+                <a:solidFill>
+                  <a:srgbClr val="6B7280"/>
+                </a:solidFill>
+                <a:latin typeface="Calibri"/>
+                <a:ea typeface="Calibri"/>
+                <a:cs typeface="Calibri"/>
+              </a:rPr>
+              <a:t>asztali</a:t>
+            </a:r>
+            <a:r>
+              <a:rPr lang="en-US" sz="2000" dirty="0">
+                <a:solidFill>
+                  <a:srgbClr val="6B7280"/>
+                </a:solidFill>
+                <a:latin typeface="Calibri"/>
+                <a:ea typeface="Calibri"/>
+                <a:cs typeface="Calibri"/>
+              </a:rPr>
+              <a:t> </a:t>
+            </a:r>
+            <a:r>
+              <a:rPr lang="en-US" sz="2000" dirty="0" err="1">
+                <a:solidFill>
+                  <a:srgbClr val="6B7280"/>
+                </a:solidFill>
+                <a:latin typeface="Calibri"/>
+                <a:ea typeface="Calibri"/>
+                <a:cs typeface="Calibri"/>
+              </a:rPr>
+              <a:t>alkalmazás</a:t>
+            </a:r>
+            <a:r>
+              <a:rPr lang="en-US" sz="2000" dirty="0">
+                <a:solidFill>
+                  <a:srgbClr val="6B7280"/>
+                </a:solidFill>
+                <a:latin typeface="Calibri"/>
+                <a:ea typeface="Calibri"/>
+                <a:cs typeface="Calibri"/>
+              </a:rPr>
+              <a:t> </a:t>
+            </a:r>
+            <a:endParaRPr lang="en-US" sz="2000" dirty="0">
+              <a:latin typeface="Calibri"/>
+              <a:ea typeface="Calibri"/>
+              <a:cs typeface="Calibri"/>
+            </a:endParaRPr>
           </a:p>
         </p:txBody>
       </p:sp>
@@ -1683,24 +1712,28 @@
           <a:ln/>
         </p:spPr>
         <p:txBody>
-          <a:bodyPr wrap="square" rtlCol="0" anchor="ctr"/>
-          <a:lstStyle/>
-          <a:p>
-            <a:pPr algn="ctr" indent="0" marL="0">
-              <a:buNone/>
-            </a:pPr>
-            <a:r>
-              <a:rPr lang="en-US" sz="1500" dirty="0">
+          <a:bodyPr wrap="square" lIns="91440" tIns="45720" rIns="91440" bIns="45720" rtlCol="0" anchor="ctr"/>
+          <a:lstStyle/>
+          <a:p>
+            <a:pPr algn="ctr"/>
+            <a:r>
+              <a:rPr lang="en-US" sz="1500">
                 <a:solidFill>
                   <a:srgbClr val="2563EB"/>
                 </a:solidFill>
-                <a:latin typeface="Calibri" pitchFamily="34" charset="0"/>
-                <a:ea typeface="Calibri" pitchFamily="34" charset="-122"/>
-                <a:cs typeface="Calibri" pitchFamily="34" charset="-120"/>
-              </a:rPr>
-              <a:t>Technológiák: WPF · XAML · C# · JSON fájl-tárolás</a:t>
-            </a:r>
-            <a:endParaRPr lang="en-US" sz="1500" dirty="0"/>
+                <a:latin typeface="Calibri"/>
+                <a:ea typeface="Calibri"/>
+                <a:cs typeface="Calibri"/>
+              </a:rPr>
+              <a:t>Szabó Károly 12.F</a:t>
+            </a:r>
+            <a:endParaRPr lang="en-US" sz="1500">
+              <a:solidFill>
+                <a:srgbClr val="2563EB"/>
+              </a:solidFill>
+              <a:ea typeface="Calibri"/>
+              <a:cs typeface="Calibri"/>
+            </a:endParaRPr>
           </a:p>
         </p:txBody>
       </p:sp>
@@ -1720,6 +1753,7 @@
         <a:solidFill>
           <a:srgbClr val="FFFFFF"/>
         </a:solidFill>
+        <a:effectLst/>
       </p:bgPr>
     </p:bg>
     <p:spTree>
@@ -1757,7 +1791,7 @@
           <a:bodyPr wrap="square" rtlCol="0" anchor="ctr"/>
           <a:lstStyle/>
           <a:p>
-            <a:pPr indent="0" marL="0">
+            <a:pPr marL="0" indent="0">
               <a:buNone/>
             </a:pPr>
             <a:r>
@@ -1944,6 +1978,7 @@
         <a:solidFill>
           <a:srgbClr val="FFFFFF"/>
         </a:solidFill>
+        <a:effectLst/>
       </p:bgPr>
     </p:bg>
     <p:spTree>
@@ -1981,7 +2016,7 @@
           <a:bodyPr wrap="square" rtlCol="0" anchor="ctr"/>
           <a:lstStyle/>
           <a:p>
-            <a:pPr indent="0" marL="0">
+            <a:pPr marL="0" indent="0">
               <a:buNone/>
             </a:pPr>
             <a:r>
@@ -2043,7 +2078,7 @@
           <a:bodyPr wrap="square" rtlCol="0" anchor="ctr"/>
           <a:lstStyle/>
           <a:p>
-            <a:pPr indent="0" marL="0">
+            <a:pPr marL="0" indent="0">
               <a:buNone/>
             </a:pPr>
             <a:r>
@@ -2107,7 +2142,7 @@
           <a:bodyPr wrap="square" rtlCol="0" anchor="ctr"/>
           <a:lstStyle/>
           <a:p>
-            <a:pPr indent="0" marL="0">
+            <a:pPr marL="0" indent="0">
               <a:buNone/>
             </a:pPr>
             <a:r>
@@ -2124,7 +2159,7 @@
             <a:endParaRPr lang="en-US" sz="1300" dirty="0"/>
           </a:p>
           <a:p>
-            <a:pPr indent="0" marL="0">
+            <a:pPr marL="0" indent="0">
               <a:buNone/>
             </a:pPr>
             <a:r>
@@ -2141,7 +2176,7 @@
             <a:endParaRPr lang="en-US" sz="1300" dirty="0"/>
           </a:p>
           <a:p>
-            <a:pPr indent="0" marL="0">
+            <a:pPr marL="0" indent="0">
               <a:buNone/>
             </a:pPr>
             <a:r>
@@ -2158,7 +2193,7 @@
             <a:endParaRPr lang="en-US" sz="1300" dirty="0"/>
           </a:p>
           <a:p>
-            <a:pPr indent="0" marL="0">
+            <a:pPr marL="0" indent="0">
               <a:buNone/>
             </a:pPr>
             <a:r>
@@ -2175,7 +2210,7 @@
             <a:endParaRPr lang="en-US" sz="1300" dirty="0"/>
           </a:p>
           <a:p>
-            <a:pPr indent="0" marL="0">
+            <a:pPr marL="0" indent="0">
               <a:buNone/>
             </a:pPr>
             <a:r>
@@ -2192,7 +2227,7 @@
             <a:endParaRPr lang="en-US" sz="1300" dirty="0"/>
           </a:p>
           <a:p>
-            <a:pPr indent="0" marL="0">
+            <a:pPr marL="0" indent="0">
               <a:buNone/>
             </a:pPr>
             <a:r>
@@ -2209,7 +2244,7 @@
             <a:endParaRPr lang="en-US" sz="1300" dirty="0"/>
           </a:p>
           <a:p>
-            <a:pPr indent="0" marL="0">
+            <a:pPr marL="0" indent="0">
               <a:buNone/>
             </a:pPr>
             <a:r>
@@ -2226,7 +2261,7 @@
             <a:endParaRPr lang="en-US" sz="1300" dirty="0"/>
           </a:p>
           <a:p>
-            <a:pPr indent="0" marL="0">
+            <a:pPr marL="0" indent="0">
               <a:buNone/>
             </a:pPr>
             <a:r>
@@ -2243,7 +2278,7 @@
             <a:endParaRPr lang="en-US" sz="1300" dirty="0"/>
           </a:p>
           <a:p>
-            <a:pPr indent="0" marL="0">
+            <a:pPr marL="0" indent="0">
               <a:buNone/>
             </a:pPr>
             <a:r>
@@ -2282,7 +2317,7 @@
           <a:bodyPr wrap="square" rtlCol="0" anchor="ctr"/>
           <a:lstStyle/>
           <a:p>
-            <a:pPr indent="0" marL="0">
+            <a:pPr marL="0" indent="0">
               <a:buNone/>
             </a:pPr>
             <a:r>
@@ -2410,6 +2445,7 @@
         <a:solidFill>
           <a:srgbClr val="FFFFFF"/>
         </a:solidFill>
+        <a:effectLst/>
       </p:bgPr>
     </p:bg>
     <p:spTree>
@@ -2447,7 +2483,7 @@
           <a:bodyPr wrap="square" rtlCol="0" anchor="ctr"/>
           <a:lstStyle/>
           <a:p>
-            <a:pPr indent="0" marL="0">
+            <a:pPr marL="0" indent="0">
               <a:buNone/>
             </a:pPr>
             <a:r>
@@ -2509,7 +2545,7 @@
           <a:bodyPr wrap="square" rtlCol="0" anchor="ctr"/>
           <a:lstStyle/>
           <a:p>
-            <a:pPr indent="0" marL="0">
+            <a:pPr marL="0" indent="0">
               <a:buNone/>
             </a:pPr>
             <a:r>
@@ -2573,7 +2609,7 @@
           <a:bodyPr wrap="square" rtlCol="0" anchor="ctr"/>
           <a:lstStyle/>
           <a:p>
-            <a:pPr indent="0" marL="0">
+            <a:pPr marL="0" indent="0">
               <a:buNone/>
             </a:pPr>
             <a:r>
@@ -2590,7 +2626,7 @@
             <a:endParaRPr lang="en-US" sz="1300" dirty="0"/>
           </a:p>
           <a:p>
-            <a:pPr indent="0" marL="0">
+            <a:pPr marL="0" indent="0">
               <a:buNone/>
             </a:pPr>
             <a:r>
@@ -2607,7 +2643,7 @@
             <a:endParaRPr lang="en-US" sz="1300" dirty="0"/>
           </a:p>
           <a:p>
-            <a:pPr indent="0" marL="0">
+            <a:pPr marL="0" indent="0">
               <a:buNone/>
             </a:pPr>
             <a:r>
@@ -2624,7 +2660,7 @@
             <a:endParaRPr lang="en-US" sz="1300" dirty="0"/>
           </a:p>
           <a:p>
-            <a:pPr indent="0" marL="0">
+            <a:pPr marL="0" indent="0">
               <a:buNone/>
             </a:pPr>
             <a:r>
@@ -2663,7 +2699,7 @@
           <a:bodyPr wrap="square" rtlCol="0" anchor="ctr"/>
           <a:lstStyle/>
           <a:p>
-            <a:pPr indent="0" marL="0">
+            <a:pPr marL="0" indent="0">
               <a:buNone/>
             </a:pPr>
             <a:r>
@@ -2727,7 +2763,7 @@
           <a:bodyPr wrap="square" rtlCol="0" anchor="ctr"/>
           <a:lstStyle/>
           <a:p>
-            <a:pPr indent="0" marL="0">
+            <a:pPr marL="0" indent="0">
               <a:buNone/>
             </a:pPr>
             <a:r>
@@ -2744,7 +2780,7 @@
             <a:endParaRPr lang="en-US" sz="1300" dirty="0"/>
           </a:p>
           <a:p>
-            <a:pPr indent="0" marL="0">
+            <a:pPr marL="0" indent="0">
               <a:buNone/>
             </a:pPr>
             <a:r>
@@ -2761,7 +2797,7 @@
             <a:endParaRPr lang="en-US" sz="1300" dirty="0"/>
           </a:p>
           <a:p>
-            <a:pPr indent="0" marL="0">
+            <a:pPr marL="0" indent="0">
               <a:buNone/>
             </a:pPr>
             <a:r>
@@ -2778,7 +2814,7 @@
             <a:endParaRPr lang="en-US" sz="1300" dirty="0"/>
           </a:p>
           <a:p>
-            <a:pPr indent="0" marL="0">
+            <a:pPr marL="0" indent="0">
               <a:buNone/>
             </a:pPr>
             <a:r>
@@ -2795,7 +2831,7 @@
             <a:endParaRPr lang="en-US" sz="1300" dirty="0"/>
           </a:p>
           <a:p>
-            <a:pPr indent="0" marL="0">
+            <a:pPr marL="0" indent="0">
               <a:buNone/>
             </a:pPr>
             <a:r>
@@ -2812,7 +2848,7 @@
             <a:endParaRPr lang="en-US" sz="1300" dirty="0"/>
           </a:p>
           <a:p>
-            <a:pPr indent="0" marL="0">
+            <a:pPr marL="0" indent="0">
               <a:buNone/>
             </a:pPr>
             <a:r>
@@ -2829,7 +2865,7 @@
             <a:endParaRPr lang="en-US" sz="1300" dirty="0"/>
           </a:p>
           <a:p>
-            <a:pPr indent="0" marL="0">
+            <a:pPr marL="0" indent="0">
               <a:buNone/>
             </a:pPr>
             <a:r>
@@ -2846,7 +2882,7 @@
             <a:endParaRPr lang="en-US" sz="1300" dirty="0"/>
           </a:p>
           <a:p>
-            <a:pPr indent="0" marL="0">
+            <a:pPr marL="0" indent="0">
               <a:buNone/>
             </a:pPr>
             <a:r>
@@ -2885,7 +2921,7 @@
           <a:bodyPr wrap="square" rtlCol="0" anchor="ctr"/>
           <a:lstStyle/>
           <a:p>
-            <a:pPr indent="0" marL="0">
+            <a:pPr marL="0" indent="0">
               <a:buNone/>
             </a:pPr>
             <a:r>
@@ -2919,6 +2955,7 @@
         <a:solidFill>
           <a:srgbClr val="FFFFFF"/>
         </a:solidFill>
+        <a:effectLst/>
       </p:bgPr>
     </p:bg>
     <p:spTree>
@@ -2956,7 +2993,7 @@
           <a:bodyPr wrap="square" rtlCol="0" anchor="ctr"/>
           <a:lstStyle/>
           <a:p>
-            <a:pPr indent="0" marL="0">
+            <a:pPr marL="0" indent="0">
               <a:buNone/>
             </a:pPr>
             <a:r>
@@ -3018,7 +3055,7 @@
           <a:bodyPr wrap="square" rtlCol="0" anchor="ctr"/>
           <a:lstStyle/>
           <a:p>
-            <a:pPr indent="0" marL="0">
+            <a:pPr marL="0" indent="0">
               <a:buNone/>
             </a:pPr>
             <a:r>
@@ -3218,6 +3255,7 @@
         <a:solidFill>
           <a:srgbClr val="FFFFFF"/>
         </a:solidFill>
+        <a:effectLst/>
       </p:bgPr>
     </p:bg>
     <p:spTree>
@@ -3255,7 +3293,7 @@
           <a:bodyPr wrap="square" rtlCol="0" anchor="ctr"/>
           <a:lstStyle/>
           <a:p>
-            <a:pPr indent="0" marL="0">
+            <a:pPr marL="0" indent="0">
               <a:buNone/>
             </a:pPr>
             <a:r>
@@ -3317,7 +3355,7 @@
           <a:bodyPr wrap="square" rtlCol="0" anchor="ctr"/>
           <a:lstStyle/>
           <a:p>
-            <a:pPr indent="0" marL="0">
+            <a:pPr marL="0" indent="0">
               <a:buNone/>
             </a:pPr>
             <a:r>
@@ -3432,7 +3470,7 @@
           <a:bodyPr wrap="square" rtlCol="0" anchor="ctr"/>
           <a:lstStyle/>
           <a:p>
-            <a:pPr indent="0" marL="0">
+            <a:pPr marL="0" indent="0">
               <a:buNone/>
             </a:pPr>
             <a:r>
@@ -3471,7 +3509,7 @@
           <a:bodyPr wrap="square" rtlCol="0" anchor="ctr"/>
           <a:lstStyle/>
           <a:p>
-            <a:pPr indent="0" marL="0">
+            <a:pPr marL="0" indent="0">
               <a:buNone/>
             </a:pPr>
             <a:r>
@@ -3535,7 +3573,7 @@
           <a:bodyPr wrap="square" rtlCol="0" anchor="ctr"/>
           <a:lstStyle/>
           <a:p>
-            <a:pPr indent="0" marL="0">
+            <a:pPr marL="0" indent="0">
               <a:buNone/>
             </a:pPr>
             <a:r>
@@ -3574,7 +3612,7 @@
           <a:bodyPr wrap="square" rtlCol="0" anchor="ctr"/>
           <a:lstStyle/>
           <a:p>
-            <a:pPr indent="0" marL="0">
+            <a:pPr marL="0" indent="0">
               <a:buNone/>
             </a:pPr>
             <a:r>
@@ -3638,7 +3676,7 @@
           <a:bodyPr wrap="square" rtlCol="0" anchor="ctr"/>
           <a:lstStyle/>
           <a:p>
-            <a:pPr indent="0" marL="0">
+            <a:pPr marL="0" indent="0">
               <a:buNone/>
             </a:pPr>
             <a:r>
@@ -3655,7 +3693,7 @@
             <a:endParaRPr lang="en-US" sz="1300" dirty="0"/>
           </a:p>
           <a:p>
-            <a:pPr indent="0" marL="0">
+            <a:pPr marL="0" indent="0">
               <a:buNone/>
             </a:pPr>
             <a:r>
@@ -3672,7 +3710,7 @@
             <a:endParaRPr lang="en-US" sz="1300" dirty="0"/>
           </a:p>
           <a:p>
-            <a:pPr indent="0" marL="0">
+            <a:pPr marL="0" indent="0">
               <a:buNone/>
             </a:pPr>
             <a:r>
@@ -3689,7 +3727,7 @@
             <a:endParaRPr lang="en-US" sz="1300" dirty="0"/>
           </a:p>
           <a:p>
-            <a:pPr indent="0" marL="0">
+            <a:pPr marL="0" indent="0">
               <a:buNone/>
             </a:pPr>
             <a:r>
@@ -3706,7 +3744,7 @@
             <a:endParaRPr lang="en-US" sz="1300" dirty="0"/>
           </a:p>
           <a:p>
-            <a:pPr indent="0" marL="0">
+            <a:pPr marL="0" indent="0">
               <a:buNone/>
             </a:pPr>
             <a:r>
@@ -3723,7 +3761,7 @@
             <a:endParaRPr lang="en-US" sz="1300" dirty="0"/>
           </a:p>
           <a:p>
-            <a:pPr indent="0" marL="0">
+            <a:pPr marL="0" indent="0">
               <a:buNone/>
             </a:pPr>
             <a:r>
@@ -3740,7 +3778,7 @@
             <a:endParaRPr lang="en-US" sz="1300" dirty="0"/>
           </a:p>
           <a:p>
-            <a:pPr indent="0" marL="0">
+            <a:pPr marL="0" indent="0">
               <a:buNone/>
             </a:pPr>
             <a:r>
@@ -3774,6 +3812,7 @@
         <a:solidFill>
           <a:srgbClr val="FFFFFF"/>
         </a:solidFill>
+        <a:effectLst/>
       </p:bgPr>
     </p:bg>
     <p:spTree>
@@ -3811,7 +3850,7 @@
           <a:bodyPr wrap="square" rtlCol="0" anchor="ctr"/>
           <a:lstStyle/>
           <a:p>
-            <a:pPr indent="0" marL="0">
+            <a:pPr marL="0" indent="0">
               <a:buNone/>
             </a:pPr>
             <a:r>
@@ -3873,7 +3912,7 @@
           <a:bodyPr wrap="square" rtlCol="0" anchor="ctr"/>
           <a:lstStyle/>
           <a:p>
-            <a:pPr indent="0" marL="0">
+            <a:pPr marL="0" indent="0">
               <a:buNone/>
             </a:pPr>
             <a:r>
@@ -3988,7 +4027,7 @@
           <a:bodyPr wrap="square" rtlCol="0" anchor="ctr"/>
           <a:lstStyle/>
           <a:p>
-            <a:pPr indent="0" marL="0">
+            <a:pPr marL="0" indent="0">
               <a:buNone/>
             </a:pPr>
             <a:r>
@@ -4116,6 +4155,7 @@
         <a:solidFill>
           <a:srgbClr val="FFFFFF"/>
         </a:solidFill>
+        <a:effectLst/>
       </p:bgPr>
     </p:bg>
     <p:spTree>
@@ -4153,7 +4193,7 @@
           <a:bodyPr wrap="square" rtlCol="0" anchor="ctr"/>
           <a:lstStyle/>
           <a:p>
-            <a:pPr indent="0" marL="0">
+            <a:pPr marL="0" indent="0">
               <a:buNone/>
             </a:pPr>
             <a:r>
@@ -4215,7 +4255,7 @@
           <a:bodyPr wrap="square" rtlCol="0" anchor="ctr"/>
           <a:lstStyle/>
           <a:p>
-            <a:pPr indent="0" marL="0">
+            <a:pPr marL="0" indent="0">
               <a:buNone/>
             </a:pPr>
             <a:r>
@@ -4279,7 +4319,7 @@
           <a:bodyPr wrap="square" rtlCol="0" anchor="ctr"/>
           <a:lstStyle/>
           <a:p>
-            <a:pPr indent="0" marL="0">
+            <a:pPr marL="0" indent="0">
               <a:buNone/>
             </a:pPr>
             <a:r>
@@ -4296,7 +4336,7 @@
             <a:endParaRPr lang="en-US" sz="1300" dirty="0"/>
           </a:p>
           <a:p>
-            <a:pPr indent="0" marL="0">
+            <a:pPr marL="0" indent="0">
               <a:buNone/>
             </a:pPr>
             <a:r>
@@ -4313,7 +4353,7 @@
             <a:endParaRPr lang="en-US" sz="1300" dirty="0"/>
           </a:p>
           <a:p>
-            <a:pPr indent="0" marL="0">
+            <a:pPr marL="0" indent="0">
               <a:buNone/>
             </a:pPr>
             <a:r>
@@ -4330,7 +4370,7 @@
             <a:endParaRPr lang="en-US" sz="1300" dirty="0"/>
           </a:p>
           <a:p>
-            <a:pPr indent="0" marL="0">
+            <a:pPr marL="0" indent="0">
               <a:buNone/>
             </a:pPr>
             <a:r>
@@ -4369,7 +4409,7 @@
           <a:bodyPr wrap="square" rtlCol="0" anchor="ctr"/>
           <a:lstStyle/>
           <a:p>
-            <a:pPr indent="0" marL="0">
+            <a:pPr marL="0" indent="0">
               <a:buNone/>
             </a:pPr>
             <a:r>
@@ -4433,7 +4473,7 @@
           <a:bodyPr wrap="square" rtlCol="0" anchor="ctr"/>
           <a:lstStyle/>
           <a:p>
-            <a:pPr indent="0" marL="0">
+            <a:pPr marL="0" indent="0">
               <a:buNone/>
             </a:pPr>
             <a:r>
@@ -4450,7 +4490,7 @@
             <a:endParaRPr lang="en-US" sz="1300" dirty="0"/>
           </a:p>
           <a:p>
-            <a:pPr indent="0" marL="0">
+            <a:pPr marL="0" indent="0">
               <a:buNone/>
             </a:pPr>
             <a:r>
@@ -4467,7 +4507,7 @@
             <a:endParaRPr lang="en-US" sz="1300" dirty="0"/>
           </a:p>
           <a:p>
-            <a:pPr indent="0" marL="0">
+            <a:pPr marL="0" indent="0">
               <a:buNone/>
             </a:pPr>
             <a:r>
@@ -4484,7 +4524,7 @@
             <a:endParaRPr lang="en-US" sz="1300" dirty="0"/>
           </a:p>
           <a:p>
-            <a:pPr indent="0" marL="0">
+            <a:pPr marL="0" indent="0">
               <a:buNone/>
             </a:pPr>
             <a:r>
@@ -4501,7 +4541,7 @@
             <a:endParaRPr lang="en-US" sz="1300" dirty="0"/>
           </a:p>
           <a:p>
-            <a:pPr indent="0" marL="0">
+            <a:pPr marL="0" indent="0">
               <a:buNone/>
             </a:pPr>
             <a:r>
@@ -4518,7 +4558,7 @@
             <a:endParaRPr lang="en-US" sz="1300" dirty="0"/>
           </a:p>
           <a:p>
-            <a:pPr indent="0" marL="0">
+            <a:pPr marL="0" indent="0">
               <a:buNone/>
             </a:pPr>
             <a:r>
@@ -4557,7 +4597,7 @@
           <a:bodyPr wrap="square" rtlCol="0" anchor="ctr"/>
           <a:lstStyle/>
           <a:p>
-            <a:pPr indent="0" marL="0">
+            <a:pPr marL="0" indent="0">
               <a:buNone/>
             </a:pPr>
             <a:r>
@@ -4596,7 +4636,7 @@
           <a:bodyPr wrap="square" rtlCol="0" anchor="ctr"/>
           <a:lstStyle/>
           <a:p>
-            <a:pPr indent="0" marL="0">
+            <a:pPr marL="0" indent="0">
               <a:buNone/>
             </a:pPr>
             <a:r>
@@ -4630,6 +4670,7 @@
         <a:solidFill>
           <a:srgbClr val="FFFFFF"/>
         </a:solidFill>
+        <a:effectLst/>
       </p:bgPr>
     </p:bg>
     <p:spTree>
@@ -4667,7 +4708,7 @@
           <a:bodyPr wrap="square" rtlCol="0" anchor="ctr"/>
           <a:lstStyle/>
           <a:p>
-            <a:pPr indent="0" marL="0">
+            <a:pPr marL="0" indent="0">
               <a:buNone/>
             </a:pPr>
             <a:r>
@@ -5139,4 +5180,299 @@
     </a:ext>
   </a:extLst>
 </a:theme>
+</file>
+
+<file path=ppt/theme/theme2.xml><?xml version="1.0" encoding="utf-8"?>
+<a:theme xmlns:a="http://schemas.openxmlformats.org/drawingml/2006/main" name="Office-téma">
+  <a:themeElements>
+    <a:clrScheme name="Office">
+      <a:dk1>
+        <a:sysClr val="windowText" lastClr="000000"/>
+      </a:dk1>
+      <a:lt1>
+        <a:sysClr val="window" lastClr="FFFFFF"/>
+      </a:lt1>
+      <a:dk2>
+        <a:srgbClr val="44546A"/>
+      </a:dk2>
+      <a:lt2>
+        <a:srgbClr val="E7E6E6"/>
+      </a:lt2>
+      <a:accent1>
+        <a:srgbClr val="4472C4"/>
+      </a:accent1>
+      <a:accent2>
+        <a:srgbClr val="ED7D31"/>
+      </a:accent2>
+      <a:accent3>
+        <a:srgbClr val="A5A5A5"/>
+      </a:accent3>
+      <a:accent4>
+        <a:srgbClr val="FFC000"/>
+      </a:accent4>
+      <a:accent5>
+        <a:srgbClr val="5B9BD5"/>
+      </a:accent5>
+      <a:accent6>
+        <a:srgbClr val="70AD47"/>
+      </a:accent6>
+      <a:hlink>
+        <a:srgbClr val="0563C1"/>
+      </a:hlink>
+      <a:folHlink>
+        <a:srgbClr val="954F72"/>
+      </a:folHlink>
+    </a:clrScheme>
+    <a:fontScheme name="Office">
+      <a:majorFont>
+        <a:latin typeface="Calibri Light" panose="020F0302020204030204"/>
+        <a:ea typeface=""/>
+        <a:cs typeface=""/>
+        <a:font script="Jpan" typeface="游ゴシック Light"/>
+        <a:font script="Hang" typeface="맑은 고딕"/>
+        <a:font script="Hans" typeface="等线 Light"/>
+        <a:font script="Hant" typeface="新細明體"/>
+        <a:font script="Arab" typeface="Times New Roman"/>
+        <a:font script="Hebr" typeface="Times New Roman"/>
+        <a:font script="Thai" typeface="Angsana New"/>
+        <a:font script="Ethi" typeface="Nyala"/>
+        <a:font script="Beng" typeface="Vrinda"/>
+        <a:font script="Gujr" typeface="Shruti"/>
+        <a:font script="Khmr" typeface="MoolBoran"/>
+        <a:font script="Knda" typeface="Tunga"/>
+        <a:font script="Guru" typeface="Raavi"/>
+        <a:font script="Cans" typeface="Euphemia"/>
+        <a:font script="Cher" typeface="Plantagenet Cherokee"/>
+        <a:font script="Yiii" typeface="Microsoft Yi Baiti"/>
+        <a:font script="Tibt" typeface="Microsoft Himalaya"/>
+        <a:font script="Thaa" typeface="MV Boli"/>
+        <a:font script="Deva" typeface="Mangal"/>
+        <a:font script="Telu" typeface="Gautami"/>
+        <a:font script="Taml" typeface="Latha"/>
+        <a:font script="Syrc" typeface="Estrangelo Edessa"/>
+        <a:font script="Orya" typeface="Kalinga"/>
+        <a:font script="Mlym" typeface="Kartika"/>
+        <a:font script="Laoo" typeface="DokChampa"/>
+        <a:font script="Sinh" typeface="Iskoola Pota"/>
+        <a:font script="Mong" typeface="Mongolian Baiti"/>
+        <a:font script="Viet" typeface="Times New Roman"/>
+        <a:font script="Uigh" typeface="Microsoft Uighur"/>
+        <a:font script="Geor" typeface="Sylfaen"/>
+        <a:font script="Armn" typeface="Arial"/>
+        <a:font script="Bugi" typeface="Leelawadee UI"/>
+        <a:font script="Bopo" typeface="Microsoft JhengHei"/>
+        <a:font script="Java" typeface="Javanese Text"/>
+        <a:font script="Lisu" typeface="Segoe UI"/>
+        <a:font script="Mymr" typeface="Myanmar Text"/>
+        <a:font script="Nkoo" typeface="Ebrima"/>
+        <a:font script="Olck" typeface="Nirmala UI"/>
+        <a:font script="Osma" typeface="Ebrima"/>
+        <a:font script="Phag" typeface="Phagspa"/>
+        <a:font script="Syrn" typeface="Estrangelo Edessa"/>
+        <a:font script="Syrj" typeface="Estrangelo Edessa"/>
+        <a:font script="Syre" typeface="Estrangelo Edessa"/>
+        <a:font script="Sora" typeface="Nirmala UI"/>
+        <a:font script="Tale" typeface="Microsoft Tai Le"/>
+        <a:font script="Talu" typeface="Microsoft New Tai Lue"/>
+        <a:font script="Tfng" typeface="Ebrima"/>
+      </a:majorFont>
+      <a:minorFont>
+        <a:latin typeface="Calibri" panose="020F0502020204030204"/>
+        <a:ea typeface=""/>
+        <a:cs typeface=""/>
+        <a:font script="Jpan" typeface="游ゴシック"/>
+        <a:font script="Hang" typeface="맑은 고딕"/>
+        <a:font script="Hans" typeface="等线"/>
+        <a:font script="Hant" typeface="新細明體"/>
+        <a:font script="Arab" typeface="Arial"/>
+        <a:font script="Hebr" typeface="Arial"/>
+        <a:font script="Thai" typeface="Cordia New"/>
+        <a:font script="Ethi" typeface="Nyala"/>
+        <a:font script="Beng" typeface="Vrinda"/>
+        <a:font script="Gujr" typeface="Shruti"/>
+        <a:font script="Khmr" typeface="DaunPenh"/>
+        <a:font script="Knda" typeface="Tunga"/>
+        <a:font script="Guru" typeface="Raavi"/>
+        <a:font script="Cans" typeface="Euphemia"/>
+        <a:font script="Cher" typeface="Plantagenet Cherokee"/>
+        <a:font script="Yiii" typeface="Microsoft Yi Baiti"/>
+        <a:font script="Tibt" typeface="Microsoft Himalaya"/>
+        <a:font script="Thaa" typeface="MV Boli"/>
+        <a:font script="Deva" typeface="Mangal"/>
+        <a:font script="Telu" typeface="Gautami"/>
+        <a:font script="Taml" typeface="Latha"/>
+        <a:font script="Syrc" typeface="Estrangelo Edessa"/>
+        <a:font script="Orya" typeface="Kalinga"/>
+        <a:font script="Mlym" typeface="Kartika"/>
+        <a:font script="Laoo" typeface="DokChampa"/>
+        <a:font script="Sinh" typeface="Iskoola Pota"/>
+        <a:font script="Mong" typeface="Mongolian Baiti"/>
+        <a:font script="Viet" typeface="Arial"/>
+        <a:font script="Uigh" typeface="Microsoft Uighur"/>
+        <a:font script="Geor" typeface="Sylfaen"/>
+        <a:font script="Armn" typeface="Arial"/>
+        <a:font script="Bugi" typeface="Leelawadee UI"/>
+        <a:font script="Bopo" typeface="Microsoft JhengHei"/>
+        <a:font script="Java" typeface="Javanese Text"/>
+        <a:font script="Lisu" typeface="Segoe UI"/>
+        <a:font script="Mymr" typeface="Myanmar Text"/>
+        <a:font script="Nkoo" typeface="Ebrima"/>
+        <a:font script="Olck" typeface="Nirmala UI"/>
+        <a:font script="Osma" typeface="Ebrima"/>
+        <a:font script="Phag" typeface="Phagspa"/>
+        <a:font script="Syrn" typeface="Estrangelo Edessa"/>
+        <a:font script="Syrj" typeface="Estrangelo Edessa"/>
+        <a:font script="Syre" typeface="Estrangelo Edessa"/>
+        <a:font script="Sora" typeface="Nirmala UI"/>
+        <a:font script="Tale" typeface="Microsoft Tai Le"/>
+        <a:font script="Talu" typeface="Microsoft New Tai Lue"/>
+        <a:font script="Tfng" typeface="Ebrima"/>
+      </a:minorFont>
+    </a:fontScheme>
+    <a:fmtScheme name="Office">
+      <a:fillStyleLst>
+        <a:solidFill>
+          <a:schemeClr val="phClr"/>
+        </a:solidFill>
+        <a:gradFill rotWithShape="1">
+          <a:gsLst>
+            <a:gs pos="0">
+              <a:schemeClr val="phClr">
+                <a:lumMod val="110000"/>
+                <a:satMod val="105000"/>
+                <a:tint val="67000"/>
+              </a:schemeClr>
+            </a:gs>
+            <a:gs pos="50000">
+              <a:schemeClr val="phClr">
+                <a:lumMod val="105000"/>
+                <a:satMod val="103000"/>
+                <a:tint val="73000"/>
+              </a:schemeClr>
+            </a:gs>
+            <a:gs pos="100000">
+              <a:schemeClr val="phClr">
+                <a:lumMod val="105000"/>
+                <a:satMod val="109000"/>
+                <a:tint val="81000"/>
+              </a:schemeClr>
+            </a:gs>
+          </a:gsLst>
+          <a:lin ang="5400000" scaled="0"/>
+        </a:gradFill>
+        <a:gradFill rotWithShape="1">
+          <a:gsLst>
+            <a:gs pos="0">
+              <a:schemeClr val="phClr">
+                <a:satMod val="103000"/>
+                <a:lumMod val="102000"/>
+                <a:tint val="94000"/>
+              </a:schemeClr>
+            </a:gs>
+            <a:gs pos="50000">
+              <a:schemeClr val="phClr">
+                <a:satMod val="110000"/>
+                <a:lumMod val="100000"/>
+                <a:shade val="100000"/>
+              </a:schemeClr>
+            </a:gs>
+            <a:gs pos="100000">
+              <a:schemeClr val="phClr">
+                <a:lumMod val="99000"/>
+                <a:satMod val="120000"/>
+                <a:shade val="78000"/>
+              </a:schemeClr>
+            </a:gs>
+          </a:gsLst>
+          <a:lin ang="5400000" scaled="0"/>
+        </a:gradFill>
+      </a:fillStyleLst>
+      <a:lnStyleLst>
+        <a:ln w="6350" cap="flat" cmpd="sng" algn="ctr">
+          <a:solidFill>
+            <a:schemeClr val="phClr"/>
+          </a:solidFill>
+          <a:prstDash val="solid"/>
+          <a:miter lim="800000"/>
+        </a:ln>
+        <a:ln w="12700" cap="flat" cmpd="sng" algn="ctr">
+          <a:solidFill>
+            <a:schemeClr val="phClr"/>
+          </a:solidFill>
+          <a:prstDash val="solid"/>
+          <a:miter lim="800000"/>
+        </a:ln>
+        <a:ln w="19050" cap="flat" cmpd="sng" algn="ctr">
+          <a:solidFill>
+            <a:schemeClr val="phClr"/>
+          </a:solidFill>
+          <a:prstDash val="solid"/>
+          <a:miter lim="800000"/>
+        </a:ln>
+      </a:lnStyleLst>
+      <a:effectStyleLst>
+        <a:effectStyle>
+          <a:effectLst/>
+        </a:effectStyle>
+        <a:effectStyle>
+          <a:effectLst/>
+        </a:effectStyle>
+        <a:effectStyle>
+          <a:effectLst>
+            <a:outerShdw blurRad="57150" dist="19050" dir="5400000" algn="ctr" rotWithShape="0">
+              <a:srgbClr val="000000">
+                <a:alpha val="63000"/>
+              </a:srgbClr>
+            </a:outerShdw>
+          </a:effectLst>
+        </a:effectStyle>
+      </a:effectStyleLst>
+      <a:bgFillStyleLst>
+        <a:solidFill>
+          <a:schemeClr val="phClr"/>
+        </a:solidFill>
+        <a:solidFill>
+          <a:schemeClr val="phClr">
+            <a:tint val="95000"/>
+            <a:satMod val="170000"/>
+          </a:schemeClr>
+        </a:solidFill>
+        <a:gradFill rotWithShape="1">
+          <a:gsLst>
+            <a:gs pos="0">
+              <a:schemeClr val="phClr">
+                <a:tint val="93000"/>
+                <a:satMod val="150000"/>
+                <a:shade val="98000"/>
+                <a:lumMod val="102000"/>
+              </a:schemeClr>
+            </a:gs>
+            <a:gs pos="50000">
+              <a:schemeClr val="phClr">
+                <a:tint val="98000"/>
+                <a:satMod val="130000"/>
+                <a:shade val="90000"/>
+                <a:lumMod val="103000"/>
+              </a:schemeClr>
+            </a:gs>
+            <a:gs pos="100000">
+              <a:schemeClr val="phClr">
+                <a:shade val="63000"/>
+                <a:satMod val="120000"/>
+              </a:schemeClr>
+            </a:gs>
+          </a:gsLst>
+          <a:lin ang="5400000" scaled="0"/>
+        </a:gradFill>
+      </a:bgFillStyleLst>
+    </a:fmtScheme>
+  </a:themeElements>
+  <a:objectDefaults/>
+  <a:extraClrSchemeLst/>
+  <a:extLst>
+    <a:ext uri="{05A4C25C-085E-4340-85A3-A5531E510DB2}">
+      <thm15:themeFamily xmlns:thm15="http://schemas.microsoft.com/office/thememl/2012/main" name="Office Theme" id="{62F939B6-93AF-4DB8-9C6B-D6C7DFDC589F}" vid="{4A3C46E8-61CC-4603-A589-7422A47A8E4A}"/>
+    </a:ext>
+  </a:extLst>
+</a:theme>
 </file>